--- a/sections/02_ringer/figures/ATLAS_EM_Layers_v5.pptx
+++ b/sections/02_ringer/figures/ATLAS_EM_Layers_v5.pptx
@@ -197,7 +197,7 @@
           <a:p>
             <a:fld id="{A122A7AB-9439-BB4B-AD65-133C0345E016}" type="datetimeFigureOut">
               <a:rPr lang="en-BR" smtClean="0"/>
-              <a:t>15/01/21</a:t>
+              <a:t>28/09/24</a:t>
             </a:fld>
             <a:endParaRPr lang="en-BR"/>
           </a:p>
@@ -685,7 +685,7 @@
           <a:p>
             <a:fld id="{750956C5-070F-0D40-AE0A-9696E1D5E180}" type="datetimeFigureOut">
               <a:rPr lang="en-BR" smtClean="0"/>
-              <a:t>15/01/21</a:t>
+              <a:t>28/09/24</a:t>
             </a:fld>
             <a:endParaRPr lang="en-BR"/>
           </a:p>
@@ -855,7 +855,7 @@
           <a:p>
             <a:fld id="{750956C5-070F-0D40-AE0A-9696E1D5E180}" type="datetimeFigureOut">
               <a:rPr lang="en-BR" smtClean="0"/>
-              <a:t>15/01/21</a:t>
+              <a:t>28/09/24</a:t>
             </a:fld>
             <a:endParaRPr lang="en-BR"/>
           </a:p>
@@ -1035,7 +1035,7 @@
           <a:p>
             <a:fld id="{750956C5-070F-0D40-AE0A-9696E1D5E180}" type="datetimeFigureOut">
               <a:rPr lang="en-BR" smtClean="0"/>
-              <a:t>15/01/21</a:t>
+              <a:t>28/09/24</a:t>
             </a:fld>
             <a:endParaRPr lang="en-BR"/>
           </a:p>
@@ -1205,7 +1205,7 @@
           <a:p>
             <a:fld id="{750956C5-070F-0D40-AE0A-9696E1D5E180}" type="datetimeFigureOut">
               <a:rPr lang="en-BR" smtClean="0"/>
-              <a:t>15/01/21</a:t>
+              <a:t>28/09/24</a:t>
             </a:fld>
             <a:endParaRPr lang="en-BR"/>
           </a:p>
@@ -1451,7 +1451,7 @@
           <a:p>
             <a:fld id="{750956C5-070F-0D40-AE0A-9696E1D5E180}" type="datetimeFigureOut">
               <a:rPr lang="en-BR" smtClean="0"/>
-              <a:t>15/01/21</a:t>
+              <a:t>28/09/24</a:t>
             </a:fld>
             <a:endParaRPr lang="en-BR"/>
           </a:p>
@@ -1683,7 +1683,7 @@
           <a:p>
             <a:fld id="{750956C5-070F-0D40-AE0A-9696E1D5E180}" type="datetimeFigureOut">
               <a:rPr lang="en-BR" smtClean="0"/>
-              <a:t>15/01/21</a:t>
+              <a:t>28/09/24</a:t>
             </a:fld>
             <a:endParaRPr lang="en-BR"/>
           </a:p>
@@ -2050,7 +2050,7 @@
           <a:p>
             <a:fld id="{750956C5-070F-0D40-AE0A-9696E1D5E180}" type="datetimeFigureOut">
               <a:rPr lang="en-BR" smtClean="0"/>
-              <a:t>15/01/21</a:t>
+              <a:t>28/09/24</a:t>
             </a:fld>
             <a:endParaRPr lang="en-BR"/>
           </a:p>
@@ -2168,7 +2168,7 @@
           <a:p>
             <a:fld id="{750956C5-070F-0D40-AE0A-9696E1D5E180}" type="datetimeFigureOut">
               <a:rPr lang="en-BR" smtClean="0"/>
-              <a:t>15/01/21</a:t>
+              <a:t>28/09/24</a:t>
             </a:fld>
             <a:endParaRPr lang="en-BR"/>
           </a:p>
@@ -2263,7 +2263,7 @@
           <a:p>
             <a:fld id="{750956C5-070F-0D40-AE0A-9696E1D5E180}" type="datetimeFigureOut">
               <a:rPr lang="en-BR" smtClean="0"/>
-              <a:t>15/01/21</a:t>
+              <a:t>28/09/24</a:t>
             </a:fld>
             <a:endParaRPr lang="en-BR"/>
           </a:p>
@@ -2540,7 +2540,7 @@
           <a:p>
             <a:fld id="{750956C5-070F-0D40-AE0A-9696E1D5E180}" type="datetimeFigureOut">
               <a:rPr lang="en-BR" smtClean="0"/>
-              <a:t>15/01/21</a:t>
+              <a:t>28/09/24</a:t>
             </a:fld>
             <a:endParaRPr lang="en-BR"/>
           </a:p>
@@ -2797,7 +2797,7 @@
           <a:p>
             <a:fld id="{750956C5-070F-0D40-AE0A-9696E1D5E180}" type="datetimeFigureOut">
               <a:rPr lang="en-BR" smtClean="0"/>
-              <a:t>15/01/21</a:t>
+              <a:t>28/09/24</a:t>
             </a:fld>
             <a:endParaRPr lang="en-BR"/>
           </a:p>
@@ -3010,7 +3010,7 @@
           <a:p>
             <a:fld id="{750956C5-070F-0D40-AE0A-9696E1D5E180}" type="datetimeFigureOut">
               <a:rPr lang="en-BR" smtClean="0"/>
-              <a:t>15/01/21</a:t>
+              <a:t>28/09/24</a:t>
             </a:fld>
             <a:endParaRPr lang="en-BR"/>
           </a:p>
@@ -3437,7 +3437,7 @@
         </p:blipFill>
         <p:spPr>
           <a:xfrm>
-            <a:off x="6245964" y="-1760298"/>
+            <a:off x="7026439" y="-1934802"/>
             <a:ext cx="9144000" cy="9144000"/>
           </a:xfrm>
           <a:prstGeom prst="rect">
@@ -3467,7 +3467,7 @@
         </p:blipFill>
         <p:spPr>
           <a:xfrm>
-            <a:off x="3793788" y="-1009236"/>
+            <a:off x="3944995" y="-876904"/>
             <a:ext cx="9144000" cy="9144000"/>
           </a:xfrm>
           <a:prstGeom prst="rect">
@@ -3497,7 +3497,7 @@
         </p:blipFill>
         <p:spPr>
           <a:xfrm>
-            <a:off x="1462425" y="-995632"/>
+            <a:off x="1425432" y="-636776"/>
             <a:ext cx="9144000" cy="9144000"/>
           </a:xfrm>
           <a:prstGeom prst="rect">
@@ -3527,12 +3527,18 @@
         </p:blipFill>
         <p:spPr>
           <a:xfrm>
-            <a:off x="-2028822" y="1296218"/>
+            <a:off x="-2525966" y="2071205"/>
             <a:ext cx="9144000" cy="9144000"/>
           </a:xfrm>
           <a:prstGeom prst="rect">
             <a:avLst/>
           </a:prstGeom>
+          <a:scene3d>
+            <a:camera prst="orthographicFront">
+              <a:rot lat="0" lon="1800000" rev="0"/>
+            </a:camera>
+            <a:lightRig rig="threePt" dir="t"/>
+          </a:scene3d>
         </p:spPr>
       </p:pic>
       <p:sp>
@@ -3549,8 +3555,8 @@
         </p:nvSpPr>
         <p:spPr>
           <a:xfrm>
-            <a:off x="7501426" y="6798927"/>
-            <a:ext cx="1157689" cy="584775"/>
+            <a:off x="7214266" y="7059896"/>
+            <a:ext cx="944489" cy="584775"/>
           </a:xfrm>
           <a:prstGeom prst="rect">
             <a:avLst/>
@@ -3569,7 +3575,7 @@
                 <a:ea typeface="CMU Serif Roman" panose="02000603000000000000" pitchFamily="2" charset="0"/>
                 <a:cs typeface="CMU Serif Roman" panose="02000603000000000000" pitchFamily="2" charset="0"/>
               </a:rPr>
-              <a:t>EM.1</a:t>
+              <a:t>EM1</a:t>
             </a:r>
           </a:p>
         </p:txBody>
@@ -3588,8 +3594,8 @@
         </p:nvSpPr>
         <p:spPr>
           <a:xfrm>
-            <a:off x="10231906" y="5575830"/>
-            <a:ext cx="1157689" cy="584775"/>
+            <a:off x="10505592" y="5618158"/>
+            <a:ext cx="944489" cy="584775"/>
           </a:xfrm>
           <a:prstGeom prst="rect">
             <a:avLst/>
@@ -3608,7 +3614,7 @@
                 <a:ea typeface="CMU Serif Roman" panose="02000603000000000000" pitchFamily="2" charset="0"/>
                 <a:cs typeface="CMU Serif Roman" panose="02000603000000000000" pitchFamily="2" charset="0"/>
               </a:rPr>
-              <a:t>EM.2</a:t>
+              <a:t>EM2</a:t>
             </a:r>
           </a:p>
         </p:txBody>
@@ -3627,8 +3633,8 @@
         </p:nvSpPr>
         <p:spPr>
           <a:xfrm>
-            <a:off x="13169243" y="4398193"/>
-            <a:ext cx="1157689" cy="584775"/>
+            <a:off x="13455724" y="4320381"/>
+            <a:ext cx="944489" cy="584775"/>
           </a:xfrm>
           <a:prstGeom prst="rect">
             <a:avLst/>
@@ -3647,7 +3653,7 @@
                 <a:ea typeface="CMU Serif Roman" panose="02000603000000000000" pitchFamily="2" charset="0"/>
                 <a:cs typeface="CMU Serif Roman" panose="02000603000000000000" pitchFamily="2" charset="0"/>
               </a:rPr>
-              <a:t>EM.3</a:t>
+              <a:t>EM3</a:t>
             </a:r>
           </a:p>
         </p:txBody>
@@ -3666,8 +3672,8 @@
         </p:nvSpPr>
         <p:spPr>
           <a:xfrm>
-            <a:off x="3794068" y="7842376"/>
-            <a:ext cx="2148345" cy="584775"/>
+            <a:off x="13314" y="8055988"/>
+            <a:ext cx="2824235" cy="584775"/>
           </a:xfrm>
           <a:prstGeom prst="rect">
             <a:avLst/>
@@ -3681,12 +3687,20 @@
           <a:lstStyle/>
           <a:p>
             <a:r>
+              <a:rPr lang="en-US" sz="3200" dirty="0">
+                <a:latin typeface="CMU Serif Roman" panose="02000603000000000000" pitchFamily="2" charset="0"/>
+                <a:ea typeface="CMU Serif Roman" panose="02000603000000000000" pitchFamily="2" charset="0"/>
+                <a:cs typeface="CMU Serif Roman" panose="02000603000000000000" pitchFamily="2" charset="0"/>
+              </a:rPr>
+              <a:t>P</a:t>
+            </a:r>
+            <a:r>
               <a:rPr lang="en-BR" sz="3200" dirty="0">
                 <a:latin typeface="CMU Serif Roman" panose="02000603000000000000" pitchFamily="2" charset="0"/>
                 <a:ea typeface="CMU Serif Roman" panose="02000603000000000000" pitchFamily="2" charset="0"/>
                 <a:cs typeface="CMU Serif Roman" panose="02000603000000000000" pitchFamily="2" charset="0"/>
               </a:rPr>
-              <a:t>presampler</a:t>
+              <a:t>resampler (PS)</a:t>
             </a:r>
           </a:p>
         </p:txBody>
